--- a/docs/DocRobot_Soukroma-AI_Analyza-Dokumentu-Firmy.pptx
+++ b/docs/DocRobot_Soukroma-AI_Analyza-Dokumentu-Firmy.pptx
@@ -3254,7 +3254,7 @@
               <a:defRPr sz="1700"/>
             </a:pPr>
             <a:r>
-              <a:t>Enterprise (RTX 4040 24GB, 64GB+ RAM): Pro velké firemní archivy</a:t>
+              <a:t>Enterprise (RTX 4090 24GB, 64GB+ RAM): Pro velké firemní archivy</a:t>
             </a:r>
           </a:p>
           <a:p>

--- a/docs/DocRobot_Soukroma-AI_Analyza-Dokumentu-Firmy.pptx
+++ b/docs/DocRobot_Soukroma-AI_Analyza-Dokumentu-Firmy.pptx
@@ -5010,7 +5010,7 @@
               <a:defRPr sz="3200"/>
             </a:pPr>
             <a:r>
-              <a:t>Cenový model a Návratnost</a:t>
+              <a:t>Investice a Provozní náklady</a:t>
             </a:r>
           </a:p>
         </p:txBody>
@@ -5035,7 +5035,7 @@
               <a:defRPr sz="1700"/>
             </a:pPr>
             <a:r>
-              <a:t>Instalace a nastavení: 40 000 – 80 000 Kč</a:t>
+              <a:t>Jednorázová instalace: 70 000 – 160 000 Kč (včetně HW)</a:t>
             </a:r>
           </a:p>
           <a:p>
@@ -5043,7 +5043,7 @@
               <a:defRPr sz="1700"/>
             </a:pPr>
             <a:r>
-              <a:t>Měsíční technická podpora: 1 000 – 5 000 Kč</a:t>
+              <a:t>Měsíční provoz: 0 Kč (Self-hosted mode)</a:t>
             </a:r>
           </a:p>
           <a:p>
@@ -5051,7 +5051,15 @@
               <a:defRPr sz="1700"/>
             </a:pPr>
             <a:r>
-              <a:t>ROI (Návratnost investice) obvykle do 6 měsíců</a:t>
+              <a:t>Aktualizace modelů &amp; Expert Support: Dle potřeby (SLA)</a:t>
+            </a:r>
+          </a:p>
+          <a:p>
+            <a:pPr>
+              <a:defRPr sz="1700"/>
+            </a:pPr>
+            <a:r>
+              <a:t>ROI (Návratnost investice): Obvykle do 6 měsíců</a:t>
             </a:r>
           </a:p>
         </p:txBody>

--- a/docs/DocRobot_Soukroma-AI_Analyza-Dokumentu-Firmy.pptx
+++ b/docs/DocRobot_Soukroma-AI_Analyza-Dokumentu-Firmy.pptx
@@ -3221,7 +3221,7 @@
               <a:defRPr sz="3200"/>
             </a:pPr>
             <a:r>
-              <a:t>Hardwarové specifikace (HW Roadmap)</a:t>
+              <a:t>Investice a Provozní náklady</a:t>
             </a:r>
           </a:p>
         </p:txBody>
@@ -3246,7 +3246,7 @@
               <a:defRPr sz="1700"/>
             </a:pPr>
             <a:r>
-              <a:t>Standard (RTX 3060 12GB, 32GB RAM): Pro jednotky tisíc stran</a:t>
+              <a:t>Jednorázová instalace: 70 000 – 160 000 Kč (včetně HW)</a:t>
             </a:r>
           </a:p>
           <a:p>
@@ -3254,7 +3254,7 @@
               <a:defRPr sz="1700"/>
             </a:pPr>
             <a:r>
-              <a:t>Enterprise (RTX 4090 24GB, 64GB+ RAM): Pro velké firemní archivy</a:t>
+              <a:t>Měsíční provoz: 0 Kč (Self-hosted mode)</a:t>
             </a:r>
           </a:p>
           <a:p>
@@ -3262,7 +3262,7 @@
               <a:defRPr sz="1700"/>
             </a:pPr>
             <a:r>
-              <a:t>SSD: 1TB - 4TB NVMe pro rychlé prohledávání databáze</a:t>
+              <a:t>Aktualizace modelů &amp; Expert Support: Dle potřeby (SLA)</a:t>
             </a:r>
           </a:p>
           <a:p>
@@ -3270,15 +3270,7 @@
               <a:defRPr sz="1700"/>
             </a:pPr>
             <a:r>
-              <a:t>OS: Ubuntu 22.04 LTS (Zabezpečená a odladěná distribuce)</a:t>
-            </a:r>
-          </a:p>
-          <a:p>
-            <a:pPr>
-              <a:defRPr sz="1700"/>
-            </a:pPr>
-            <a:r>
-              <a:t>NVIDIA CUDA: Plná optimalizace pro lokální LLM modely</a:t>
+              <a:t>ROI (Návratnost investice): Obvykle do 6 měsíců</a:t>
             </a:r>
           </a:p>
         </p:txBody>
@@ -5010,7 +5002,7 @@
               <a:defRPr sz="3200"/>
             </a:pPr>
             <a:r>
-              <a:t>Investice a Provozní náklady</a:t>
+              <a:t>Řešení na klíč (HW + SW)</a:t>
             </a:r>
           </a:p>
         </p:txBody>
@@ -5035,7 +5027,7 @@
               <a:defRPr sz="1700"/>
             </a:pPr>
             <a:r>
-              <a:t>Jednorázová instalace: 70 000 – 160 000 Kč (včetně HW)</a:t>
+              <a:t>Dodávka včetně optimalizované pracovní stanice</a:t>
             </a:r>
           </a:p>
           <a:p>
@@ -5043,7 +5035,7 @@
               <a:defRPr sz="1700"/>
             </a:pPr>
             <a:r>
-              <a:t>Měsíční provoz: 0 Kč (Self-hosted mode)</a:t>
+              <a:t>Kompletně předinstalovaný systém (Plug &amp; Play)</a:t>
             </a:r>
           </a:p>
           <a:p>
@@ -5051,7 +5043,7 @@
               <a:defRPr sz="1700"/>
             </a:pPr>
             <a:r>
-              <a:t>Aktualizace modelů &amp; Expert Support: Dle potřeby (SLA)</a:t>
+              <a:t>Maximální bezpečnost: Možnost provozu zcela bez internetu</a:t>
             </a:r>
           </a:p>
           <a:p>
@@ -5059,7 +5051,7 @@
               <a:defRPr sz="1700"/>
             </a:pPr>
             <a:r>
-              <a:t>ROI (Návratnost investice): Obvykle do 6 měsíců</a:t>
+              <a:t>Garance kompatibility softwaru s dodaným hardwarem</a:t>
             </a:r>
           </a:p>
         </p:txBody>
@@ -5206,7 +5198,7 @@
               <a:defRPr sz="3200"/>
             </a:pPr>
             <a:r>
-              <a:t>Řešení na klíč (HW + SW)</a:t>
+              <a:t>Hardwarové specifikace (HW Roadmap)</a:t>
             </a:r>
           </a:p>
         </p:txBody>
@@ -5231,7 +5223,7 @@
               <a:defRPr sz="1700"/>
             </a:pPr>
             <a:r>
-              <a:t>Dodávka včetně optimalizované pracovní stanice</a:t>
+              <a:t>Standard (RTX 3060 12GB, 32GB RAM): Pro jednotky tisíc stran</a:t>
             </a:r>
           </a:p>
           <a:p>
@@ -5239,7 +5231,7 @@
               <a:defRPr sz="1700"/>
             </a:pPr>
             <a:r>
-              <a:t>Kompletně předinstalovaný systém (Plug &amp; Play)</a:t>
+              <a:t>Enterprise (RTX 4090 24GB, 64GB+ RAM): Pro velké firemní archivy</a:t>
             </a:r>
           </a:p>
           <a:p>
@@ -5247,7 +5239,7 @@
               <a:defRPr sz="1700"/>
             </a:pPr>
             <a:r>
-              <a:t>Maximální bezpečnost: Možnost provozu zcela bez internetu</a:t>
+              <a:t>SSD: 1TB - 4TB NVMe pro rychlé prohledávání databáze</a:t>
             </a:r>
           </a:p>
           <a:p>
@@ -5255,7 +5247,15 @@
               <a:defRPr sz="1700"/>
             </a:pPr>
             <a:r>
-              <a:t>Garance kompatibility softwaru s dodaným hardwarem</a:t>
+              <a:t>OS: Ubuntu 22.04 LTS (Zabezpečená a odladěná distribuce)</a:t>
+            </a:r>
+          </a:p>
+          <a:p>
+            <a:pPr>
+              <a:defRPr sz="1700"/>
+            </a:pPr>
+            <a:r>
+              <a:t>NVIDIA CUDA: Plná optimalizace pro lokální LLM modely</a:t>
             </a:r>
           </a:p>
         </p:txBody>
